--- a/data-eng/decks/w3d1s4.pptx
+++ b/data-eng/decks/w3d1s4.pptx
@@ -3099,7 +3099,7 @@
       <p:grpSpPr/>
       <p:sp>
         <p:nvSpPr>
-          <p:cNvPr id="2" name="Oval 1"/>
+          <p:cNvPr id="2" name="deckgen:decor"/>
           <p:cNvSpPr/>
           <p:nvPr/>
         </p:nvSpPr>
@@ -3129,7 +3129,7 @@
       </p:sp>
       <p:sp>
         <p:nvSpPr>
-          <p:cNvPr id="3" name="Oval 2"/>
+          <p:cNvPr id="3" name="deckgen:decor"/>
           <p:cNvSpPr/>
           <p:nvPr/>
         </p:nvSpPr>
@@ -3159,7 +3159,7 @@
       </p:sp>
       <p:sp>
         <p:nvSpPr>
-          <p:cNvPr id="4" name="Oval 3"/>
+          <p:cNvPr id="4" name="deckgen:decor"/>
           <p:cNvSpPr/>
           <p:nvPr/>
         </p:nvSpPr>
@@ -3189,7 +3189,7 @@
       </p:sp>
       <p:sp>
         <p:nvSpPr>
-          <p:cNvPr id="5" name="Rectangle 4"/>
+          <p:cNvPr id="5" name="deckgen:decor"/>
           <p:cNvSpPr/>
           <p:nvPr/>
         </p:nvSpPr>
@@ -3219,7 +3219,7 @@
       </p:sp>
       <p:sp>
         <p:nvSpPr>
-          <p:cNvPr id="6" name="Oval 5"/>
+          <p:cNvPr id="6" name="deckgen:decor"/>
           <p:cNvSpPr/>
           <p:nvPr/>
         </p:nvSpPr>
@@ -3249,7 +3249,7 @@
       </p:sp>
       <p:sp>
         <p:nvSpPr>
-          <p:cNvPr id="7" name="Oval 6"/>
+          <p:cNvPr id="7" name="deckgen:decor"/>
           <p:cNvSpPr/>
           <p:nvPr/>
         </p:nvSpPr>
@@ -3279,7 +3279,7 @@
       </p:sp>
       <p:sp>
         <p:nvSpPr>
-          <p:cNvPr id="8" name="Oval 7"/>
+          <p:cNvPr id="8" name="deckgen:decor"/>
           <p:cNvSpPr/>
           <p:nvPr/>
         </p:nvSpPr>
@@ -3309,7 +3309,7 @@
       </p:sp>
       <p:sp>
         <p:nvSpPr>
-          <p:cNvPr id="9" name="Oval 8"/>
+          <p:cNvPr id="9" name="deckgen:decor"/>
           <p:cNvSpPr/>
           <p:nvPr/>
         </p:nvSpPr>
@@ -3339,7 +3339,7 @@
       </p:sp>
       <p:sp>
         <p:nvSpPr>
-          <p:cNvPr id="10" name="Rectangle 9"/>
+          <p:cNvPr id="10" name="deckgen:decor"/>
           <p:cNvSpPr/>
           <p:nvPr/>
         </p:nvSpPr>
@@ -3599,7 +3599,7 @@
       <p:grpSpPr/>
       <p:sp>
         <p:nvSpPr>
-          <p:cNvPr id="2" name="Oval 1"/>
+          <p:cNvPr id="2" name="deckgen:decor"/>
           <p:cNvSpPr/>
           <p:nvPr/>
         </p:nvSpPr>
@@ -3629,7 +3629,7 @@
       </p:sp>
       <p:sp>
         <p:nvSpPr>
-          <p:cNvPr id="3" name="Oval 2"/>
+          <p:cNvPr id="3" name="deckgen:decor"/>
           <p:cNvSpPr/>
           <p:nvPr/>
         </p:nvSpPr>
@@ -3805,7 +3805,7 @@
                 <a:ea typeface="Pretendard"/>
                 <a:cs typeface="Pretendard"/>
               </a:rPr>
-              <a:t>orders_step1.parquet 에 고객 마스터를 붙여 orders_enriched.parquet 를 만듭니다 — 묶고, 붙이고, 시간축으로 접는 세 동작</a:t>
+              <a:t>나흘 뒤 10-12(월) 3-2 — orders_step1.parquet 에 고객 마스터를 붙입니다. 그때까지 week3 파일 넷을 지우지 마세요</a:t>
             </a:r>
           </a:p>
         </p:txBody>
@@ -4406,7 +4406,7 @@
       <p:grpSpPr/>
       <p:sp>
         <p:nvSpPr>
-          <p:cNvPr id="2" name="Oval 1"/>
+          <p:cNvPr id="2" name="deckgen:decor"/>
           <p:cNvSpPr/>
           <p:nvPr/>
         </p:nvSpPr>
@@ -4436,7 +4436,7 @@
       </p:sp>
       <p:sp>
         <p:nvSpPr>
-          <p:cNvPr id="3" name="Oval 2"/>
+          <p:cNvPr id="3" name="deckgen:decor"/>
           <p:cNvSpPr/>
           <p:nvPr/>
         </p:nvSpPr>
@@ -4466,7 +4466,7 @@
       </p:sp>
       <p:sp>
         <p:nvSpPr>
-          <p:cNvPr id="4" name="Oval 3"/>
+          <p:cNvPr id="4" name="deckgen:decor"/>
           <p:cNvSpPr/>
           <p:nvPr/>
         </p:nvSpPr>
@@ -5260,7 +5260,7 @@
                 <a:ea typeface="Pretendard"/>
                 <a:cs typeface="Pretendard"/>
               </a:rPr>
-              <a:t>orders_step1.parquet 가 (1015, 10) 안팎이고 order_date 가 datetime64[ns] 면 오늘 목표 달성</a:t>
+              <a:t>orders_step1.parquet 가 (1015, 10) 안팎이고 order_date 가 datetime64[us] 면 오늘 목표 달성</a:t>
             </a:r>
           </a:p>
         </p:txBody>
@@ -5397,7 +5397,7 @@
       <p:grpSpPr/>
       <p:sp>
         <p:nvSpPr>
-          <p:cNvPr id="2" name="Oval 1"/>
+          <p:cNvPr id="2" name="deckgen:decor"/>
           <p:cNvSpPr/>
           <p:nvPr/>
         </p:nvSpPr>
@@ -5427,7 +5427,7 @@
       </p:sp>
       <p:sp>
         <p:nvSpPr>
-          <p:cNvPr id="3" name="Oval 2"/>
+          <p:cNvPr id="3" name="deckgen:decor"/>
           <p:cNvSpPr/>
           <p:nvPr/>
         </p:nvSpPr>
@@ -5457,7 +5457,7 @@
       </p:sp>
       <p:sp>
         <p:nvSpPr>
-          <p:cNvPr id="4" name="Oval 3"/>
+          <p:cNvPr id="4" name="deckgen:decor"/>
           <p:cNvSpPr/>
           <p:nvPr/>
         </p:nvSpPr>
@@ -7558,7 +7558,7 @@
       <p:grpSpPr/>
       <p:sp>
         <p:nvSpPr>
-          <p:cNvPr id="2" name="Oval 1"/>
+          <p:cNvPr id="2" name="deckgen:decor"/>
           <p:cNvSpPr/>
           <p:nvPr/>
         </p:nvSpPr>
@@ -7588,7 +7588,7 @@
       </p:sp>
       <p:sp>
         <p:nvSpPr>
-          <p:cNvPr id="3" name="Oval 2"/>
+          <p:cNvPr id="3" name="deckgen:decor"/>
           <p:cNvSpPr/>
           <p:nvPr/>
         </p:nvSpPr>
@@ -7618,7 +7618,7 @@
       </p:sp>
       <p:sp>
         <p:nvSpPr>
-          <p:cNvPr id="4" name="Oval 3"/>
+          <p:cNvPr id="4" name="deckgen:decor"/>
           <p:cNvSpPr/>
           <p:nvPr/>
         </p:nvSpPr>
@@ -9719,7 +9719,7 @@
       <p:grpSpPr/>
       <p:sp>
         <p:nvSpPr>
-          <p:cNvPr id="2" name="Oval 1"/>
+          <p:cNvPr id="2" name="deckgen:decor"/>
           <p:cNvSpPr/>
           <p:nvPr/>
         </p:nvSpPr>
@@ -9749,7 +9749,7 @@
       </p:sp>
       <p:sp>
         <p:nvSpPr>
-          <p:cNvPr id="3" name="Oval 2"/>
+          <p:cNvPr id="3" name="deckgen:decor"/>
           <p:cNvSpPr/>
           <p:nvPr/>
         </p:nvSpPr>
@@ -9779,7 +9779,7 @@
       </p:sp>
       <p:sp>
         <p:nvSpPr>
-          <p:cNvPr id="4" name="Oval 3"/>
+          <p:cNvPr id="4" name="deckgen:decor"/>
           <p:cNvSpPr/>
           <p:nvPr/>
         </p:nvSpPr>
@@ -10662,7 +10662,7 @@
                 <a:ea typeface="Pretendard"/>
                 <a:cs typeface="Pretendard"/>
               </a:rPr>
-              <a:t>datetime64[ns] — 3-2 에서 이어 쓸 준비 완료</a:t>
+              <a:t>datetime64[us] — 3-2 에서 이어 쓸 준비 완료</a:t>
             </a:r>
           </a:p>
         </p:txBody>
@@ -10933,7 +10933,7 @@
       <p:grpSpPr/>
       <p:sp>
         <p:nvSpPr>
-          <p:cNvPr id="2" name="Oval 1"/>
+          <p:cNvPr id="2" name="deckgen:decor"/>
           <p:cNvSpPr/>
           <p:nvPr/>
         </p:nvSpPr>
@@ -10963,7 +10963,7 @@
       </p:sp>
       <p:sp>
         <p:nvSpPr>
-          <p:cNvPr id="3" name="Oval 2"/>
+          <p:cNvPr id="3" name="deckgen:decor"/>
           <p:cNvSpPr/>
           <p:nvPr/>
         </p:nvSpPr>
@@ -10993,7 +10993,7 @@
       </p:sp>
       <p:sp>
         <p:nvSpPr>
-          <p:cNvPr id="4" name="Oval 3"/>
+          <p:cNvPr id="4" name="deckgen:decor"/>
           <p:cNvSpPr/>
           <p:nvPr/>
         </p:nvSpPr>
@@ -12433,7 +12433,7 @@
       <p:grpSpPr/>
       <p:sp>
         <p:nvSpPr>
-          <p:cNvPr id="2" name="Oval 1"/>
+          <p:cNvPr id="2" name="deckgen:decor"/>
           <p:cNvSpPr/>
           <p:nvPr/>
         </p:nvSpPr>
@@ -12463,7 +12463,7 @@
       </p:sp>
       <p:sp>
         <p:nvSpPr>
-          <p:cNvPr id="3" name="Oval 2"/>
+          <p:cNvPr id="3" name="deckgen:decor"/>
           <p:cNvSpPr/>
           <p:nvPr/>
         </p:nvSpPr>
@@ -12493,7 +12493,7 @@
       </p:sp>
       <p:sp>
         <p:nvSpPr>
-          <p:cNvPr id="4" name="Oval 3"/>
+          <p:cNvPr id="4" name="deckgen:decor"/>
           <p:cNvSpPr/>
           <p:nvPr/>
         </p:nvSpPr>
@@ -13195,7 +13195,7 @@
                 <a:ea typeface="Pretendard"/>
                 <a:cs typeface="Pretendard"/>
               </a:rPr>
-              <a:t>SettingWithCopyWarning</a:t>
+              <a:t>ChainedAssignmentError</a:t>
             </a:r>
           </a:p>
           <a:p>
@@ -13213,7 +13213,7 @@
                 <a:ea typeface="Pretendard"/>
                 <a:cs typeface="Pretendard"/>
               </a:rPr>
-              <a:t>원본이 안 바뀜</a:t>
+              <a:t>(pandas 2: SettingWithCopy)</a:t>
             </a:r>
           </a:p>
         </p:txBody>
@@ -14135,7 +14135,7 @@
       <p:grpSpPr/>
       <p:sp>
         <p:nvSpPr>
-          <p:cNvPr id="2" name="Oval 1"/>
+          <p:cNvPr id="2" name="deckgen:decor"/>
           <p:cNvSpPr/>
           <p:nvPr/>
         </p:nvSpPr>
@@ -14165,7 +14165,7 @@
       </p:sp>
       <p:sp>
         <p:nvSpPr>
-          <p:cNvPr id="3" name="Oval 2"/>
+          <p:cNvPr id="3" name="deckgen:decor"/>
           <p:cNvSpPr/>
           <p:nvPr/>
         </p:nvSpPr>
@@ -14195,7 +14195,7 @@
       </p:sp>
       <p:sp>
         <p:nvSpPr>
-          <p:cNvPr id="4" name="Oval 3"/>
+          <p:cNvPr id="4" name="deckgen:decor"/>
           <p:cNvSpPr/>
           <p:nvPr/>
         </p:nvSpPr>
@@ -15255,7 +15255,7 @@
       <p:grpSpPr/>
       <p:sp>
         <p:nvSpPr>
-          <p:cNvPr id="2" name="Oval 1"/>
+          <p:cNvPr id="2" name="deckgen:decor"/>
           <p:cNvSpPr/>
           <p:nvPr/>
         </p:nvSpPr>
@@ -15285,7 +15285,7 @@
       </p:sp>
       <p:sp>
         <p:nvSpPr>
-          <p:cNvPr id="3" name="Oval 2"/>
+          <p:cNvPr id="3" name="deckgen:decor"/>
           <p:cNvSpPr/>
           <p:nvPr/>
         </p:nvSpPr>
@@ -15315,7 +15315,7 @@
       </p:sp>
       <p:sp>
         <p:nvSpPr>
-          <p:cNvPr id="4" name="Oval 3"/>
+          <p:cNvPr id="4" name="deckgen:decor"/>
           <p:cNvSpPr/>
           <p:nvPr/>
         </p:nvSpPr>
@@ -15521,7 +15521,7 @@
       </p:sp>
       <p:sp>
         <p:nvSpPr>
-          <p:cNvPr id="10" name="TextBox 9"/>
+          <p:cNvPr id="10" name="deckgen:ornament"/>
           <p:cNvSpPr txBox="1"/>
           <p:nvPr/>
         </p:nvSpPr>
@@ -15706,7 +15706,7 @@
       </p:sp>
       <p:sp>
         <p:nvSpPr>
-          <p:cNvPr id="14" name="TextBox 13"/>
+          <p:cNvPr id="14" name="deckgen:ornament"/>
           <p:cNvSpPr txBox="1"/>
           <p:nvPr/>
         </p:nvSpPr>
@@ -15891,7 +15891,7 @@
       </p:sp>
       <p:sp>
         <p:nvSpPr>
-          <p:cNvPr id="18" name="TextBox 17"/>
+          <p:cNvPr id="18" name="deckgen:ornament"/>
           <p:cNvSpPr txBox="1"/>
           <p:nvPr/>
         </p:nvSpPr>
@@ -16076,7 +16076,7 @@
       </p:sp>
       <p:sp>
         <p:nvSpPr>
-          <p:cNvPr id="22" name="TextBox 21"/>
+          <p:cNvPr id="22" name="deckgen:ornament"/>
           <p:cNvSpPr txBox="1"/>
           <p:nvPr/>
         </p:nvSpPr>
@@ -16261,7 +16261,7 @@
                 <a:ea typeface="Pretendard"/>
                 <a:cs typeface="Pretendard"/>
               </a:rPr>
-              <a:t>준비: venv 활성화 + pandas·pyarrow · orders_step1.parquet 가 ~/data-eng/week3 에 있어야 — 없으면 3-1 실습 2~6단계를 다시 실행</a:t>
+              <a:t>준비: venv 활성화 + pandas·pyarrow · orders_step1.parquet 가 ~/data-eng/week3 에 있어야 — 없으면 3-1 실습 1H 2단계 + 1.5H 1·4·5·7단계를 다시 실행</a:t>
             </a:r>
           </a:p>
         </p:txBody>

--- a/data-eng/decks/w3d1s4.pptx
+++ b/data-eng/decks/w3d1s4.pptx
@@ -5260,7 +5260,7 @@
                 <a:ea typeface="Pretendard"/>
                 <a:cs typeface="Pretendard"/>
               </a:rPr>
-              <a:t>orders_step1.parquet 가 (1015, 10) 안팎이고 order_date 가 datetime64[us] 면 오늘 목표 달성</a:t>
+              <a:t>orders_step1.parquet 가 (1015, 10) 이고 order_date 가 datetime64[us] 면 오늘 목표 달성</a:t>
             </a:r>
           </a:p>
         </p:txBody>
